--- a/exports/pptx/lessons/primary-module-08-yoga/day-01-hook.pptx
+++ b/exports/pptx/lessons/primary-module-08-yoga/day-01-hook.pptx
@@ -16,9 +16,11 @@
     <p:sldId id="264" r:id="rId10"/>
     <p:sldId id="265" r:id="rId11"/>
     <p:sldId id="266" r:id="rId12"/>
+    <p:sldId id="267" r:id="rId13"/>
+    <p:sldId id="268" r:id="rId14"/>
   </p:sldIdLst>
   <p:notesMasterIdLst>
-    <p:notesMasterId r:id="rId13"/>
+    <p:notesMasterId r:id="rId15"/>
   </p:notesMasterIdLst>
   <p:sldSz cx="9144000" cy="5143500"/>
   <p:notesSz cx="5143500" cy="9144000"/>
@@ -712,6 +714,182 @@
             <a:fld id="{F7021451-1387-4CA6-816F-3879F97B5CBC}" type="slidenum">
               <a:rPr lang="en-US"/>
               <a:t>11</a:t>
+            </a:fld>
+            <a:endParaRPr lang="en-US"/>
+          </a:p>
+        </p:txBody>
+      </p:sp>
+    </p:spTree>
+    <p:extLst>
+      <p:ext uri="{BB962C8B-B14F-4D97-AF65-F5344CB8AC3E}">
+        <p14:creationId xmlns:p14="http://schemas.microsoft.com/office/powerpoint/2010/main" val="1024086991"/>
+      </p:ext>
+    </p:extLst>
+  </p:cSld>
+  <p:clrMapOvr>
+    <a:masterClrMapping/>
+  </p:clrMapOvr>
+</p:notes>
+</file>
+
+<file path=ppt/notesSlides/notesSlide12.xml><?xml version="1.0" encoding="utf-8"?>
+<p:notes xmlns:a="http://schemas.openxmlformats.org/drawingml/2006/main" xmlns:r="http://schemas.openxmlformats.org/officeDocument/2006/relationships" xmlns:p="http://schemas.openxmlformats.org/presentationml/2006/main">
+  <p:cSld>
+    <p:spTree>
+      <p:nvGrpSpPr>
+        <p:cNvPr id="1" name=""/>
+        <p:cNvGrpSpPr/>
+        <p:nvPr/>
+      </p:nvGrpSpPr>
+      <p:grpSpPr>
+        <a:xfrm>
+          <a:off x="0" y="0"/>
+          <a:ext cx="0" cy="0"/>
+          <a:chOff x="0" y="0"/>
+          <a:chExt cx="0" cy="0"/>
+        </a:xfrm>
+      </p:grpSpPr>
+      <p:sp>
+        <p:nvSpPr>
+          <p:cNvPr id="2" name="Slide Image Placeholder 1"/>
+          <p:cNvSpPr>
+            <a:spLocks noGrp="1" noRot="1" noChangeAspect="1"/>
+          </p:cNvSpPr>
+          <p:nvPr>
+            <p:ph type="sldImg"/>
+          </p:nvPr>
+        </p:nvSpPr>
+        <p:spPr/>
+      </p:sp>
+      <p:sp>
+        <p:nvSpPr>
+          <p:cNvPr id="3" name="Notes Placeholder 2"/>
+          <p:cNvSpPr>
+            <a:spLocks noGrp="1"/>
+          </p:cNvSpPr>
+          <p:nvPr>
+            <p:ph type="body" idx="1"/>
+          </p:nvPr>
+        </p:nvSpPr>
+        <p:spPr/>
+        <p:txBody>
+          <a:bodyPr/>
+          <a:lstStyle/>
+          <a:p>
+            <a:r>
+              <a:rPr lang="en-US" dirty="0"/>
+              <a:t/>
+            </a:r>
+            <a:endParaRPr lang="en-US" dirty="0"/>
+          </a:p>
+        </p:txBody>
+      </p:sp>
+      <p:sp>
+        <p:nvSpPr>
+          <p:cNvPr id="4" name="Slide Number Placeholder 3"/>
+          <p:cNvSpPr>
+            <a:spLocks noGrp="1"/>
+          </p:cNvSpPr>
+          <p:nvPr>
+            <p:ph type="sldNum" sz="quarter" idx="10"/>
+          </p:nvPr>
+        </p:nvSpPr>
+        <p:spPr/>
+        <p:txBody>
+          <a:bodyPr/>
+          <a:lstStyle/>
+          <a:p>
+            <a:fld id="{F7021451-1387-4CA6-816F-3879F97B5CBC}" type="slidenum">
+              <a:rPr lang="en-US"/>
+              <a:t>12</a:t>
+            </a:fld>
+            <a:endParaRPr lang="en-US"/>
+          </a:p>
+        </p:txBody>
+      </p:sp>
+    </p:spTree>
+    <p:extLst>
+      <p:ext uri="{BB962C8B-B14F-4D97-AF65-F5344CB8AC3E}">
+        <p14:creationId xmlns:p14="http://schemas.microsoft.com/office/powerpoint/2010/main" val="1024086991"/>
+      </p:ext>
+    </p:extLst>
+  </p:cSld>
+  <p:clrMapOvr>
+    <a:masterClrMapping/>
+  </p:clrMapOvr>
+</p:notes>
+</file>
+
+<file path=ppt/notesSlides/notesSlide13.xml><?xml version="1.0" encoding="utf-8"?>
+<p:notes xmlns:a="http://schemas.openxmlformats.org/drawingml/2006/main" xmlns:r="http://schemas.openxmlformats.org/officeDocument/2006/relationships" xmlns:p="http://schemas.openxmlformats.org/presentationml/2006/main">
+  <p:cSld>
+    <p:spTree>
+      <p:nvGrpSpPr>
+        <p:cNvPr id="1" name=""/>
+        <p:cNvGrpSpPr/>
+        <p:nvPr/>
+      </p:nvGrpSpPr>
+      <p:grpSpPr>
+        <a:xfrm>
+          <a:off x="0" y="0"/>
+          <a:ext cx="0" cy="0"/>
+          <a:chOff x="0" y="0"/>
+          <a:chExt cx="0" cy="0"/>
+        </a:xfrm>
+      </p:grpSpPr>
+      <p:sp>
+        <p:nvSpPr>
+          <p:cNvPr id="2" name="Slide Image Placeholder 1"/>
+          <p:cNvSpPr>
+            <a:spLocks noGrp="1" noRot="1" noChangeAspect="1"/>
+          </p:cNvSpPr>
+          <p:nvPr>
+            <p:ph type="sldImg"/>
+          </p:nvPr>
+        </p:nvSpPr>
+        <p:spPr/>
+      </p:sp>
+      <p:sp>
+        <p:nvSpPr>
+          <p:cNvPr id="3" name="Notes Placeholder 2"/>
+          <p:cNvSpPr>
+            <a:spLocks noGrp="1"/>
+          </p:cNvSpPr>
+          <p:nvPr>
+            <p:ph type="body" idx="1"/>
+          </p:nvPr>
+        </p:nvSpPr>
+        <p:spPr/>
+        <p:txBody>
+          <a:bodyPr/>
+          <a:lstStyle/>
+          <a:p>
+            <a:r>
+              <a:rPr lang="en-US" dirty="0"/>
+              <a:t/>
+            </a:r>
+            <a:endParaRPr lang="en-US" dirty="0"/>
+          </a:p>
+        </p:txBody>
+      </p:sp>
+      <p:sp>
+        <p:nvSpPr>
+          <p:cNvPr id="4" name="Slide Number Placeholder 3"/>
+          <p:cNvSpPr>
+            <a:spLocks noGrp="1"/>
+          </p:cNvSpPr>
+          <p:nvPr>
+            <p:ph type="sldNum" sz="quarter" idx="10"/>
+          </p:nvPr>
+        </p:nvSpPr>
+        <p:spPr/>
+        <p:txBody>
+          <a:bodyPr/>
+          <a:lstStyle/>
+          <a:p>
+            <a:fld id="{F7021451-1387-4CA6-816F-3879F97B5CBC}" type="slidenum">
+              <a:rPr lang="en-US"/>
+              <a:t>13</a:t>
             </a:fld>
             <a:endParaRPr lang="en-US"/>
           </a:p>
@@ -1965,148 +2143,6 @@
         </p:nvSpPr>
         <p:spPr>
           <a:xfrm>
-            <a:off x="406301" y="1223963"/>
-            <a:ext cx="8498026" cy="274290"/>
-          </a:xfrm>
-          <a:prstGeom prst="rect">
-            <a:avLst/>
-          </a:prstGeom>
-          <a:noFill/>
-          <a:ln/>
-        </p:spPr>
-        <p:txBody>
-          <a:bodyPr wrap="square" lIns="0" tIns="0" rIns="0" bIns="0" rtlCol="0" anchor="t"/>
-          <a:lstStyle/>
-          <a:p>
-            <a:pPr algn="l" indent="0" marL="0">
-              <a:lnSpc>
-                <a:spcPts val="2160"/>
-              </a:lnSpc>
-              <a:spcBef>
-                <a:spcPts val="600"/>
-              </a:spcBef>
-              <a:spcAft>
-                <a:spcPts val="800"/>
-              </a:spcAft>
-              <a:buNone/>
-            </a:pPr>
-            <a:r>
-              <a:rPr lang="en-US" sz="1800" b="1" dirty="0">
-                <a:solidFill>
-                  <a:srgbClr val="E07A5F"/>
-                </a:solidFill>
-                <a:latin typeface="Georgia" pitchFamily="34" charset="0"/>
-                <a:ea typeface="Georgia" pitchFamily="34" charset="-122"/>
-                <a:cs typeface="Georgia" pitchFamily="34" charset="-120"/>
-              </a:rPr>
-              <a:t>Goal</a:t>
-            </a:r>
-            <a:endParaRPr lang="en-US" sz="1800" dirty="0"/>
-          </a:p>
-        </p:txBody>
-      </p:sp>
-      <p:sp>
-        <p:nvSpPr>
-          <p:cNvPr id="6" name="Text 4"/>
-          <p:cNvSpPr/>
-          <p:nvPr/>
-        </p:nvSpPr>
-        <p:spPr>
-          <a:xfrm>
-            <a:off x="406301" y="1637854"/>
-            <a:ext cx="8498026" cy="213271"/>
-          </a:xfrm>
-          <a:prstGeom prst="rect">
-            <a:avLst/>
-          </a:prstGeom>
-          <a:noFill/>
-          <a:ln/>
-        </p:spPr>
-        <p:txBody>
-          <a:bodyPr wrap="square" lIns="0" tIns="0" rIns="0" bIns="0" rtlCol="0" anchor="t"/>
-          <a:lstStyle/>
-          <a:p>
-            <a:pPr algn="l" indent="0" marL="0">
-              <a:lnSpc>
-                <a:spcPts val="1680"/>
-              </a:lnSpc>
-              <a:spcBef>
-                <a:spcPts val="300"/>
-              </a:spcBef>
-              <a:spcAft>
-                <a:spcPts val="300"/>
-              </a:spcAft>
-              <a:buNone/>
-            </a:pPr>
-            <a:r>
-              <a:rPr lang="en-US" sz="1200" dirty="0">
-                <a:solidFill>
-                  <a:srgbClr val="2C2C2C"/>
-                </a:solidFill>
-                <a:latin typeface="Verdana" pitchFamily="34" charset="0"/>
-                <a:ea typeface="Verdana" pitchFamily="34" charset="-122"/>
-                <a:cs typeface="Verdana" pitchFamily="34" charset="-120"/>
-              </a:rPr>
-              <a:t>Children meet yoga through a story and stand in </a:t>
-            </a:r>
-            <a:pPr algn="l" indent="0" marL="0">
-              <a:lnSpc>
-                <a:spcPts val="1680"/>
-              </a:lnSpc>
-              <a:spcBef>
-                <a:spcPts val="300"/>
-              </a:spcBef>
-              <a:spcAft>
-                <a:spcPts val="300"/>
-              </a:spcAft>
-              <a:buNone/>
-            </a:pPr>
-            <a:r>
-              <a:rPr lang="en-US" sz="1200" i="1" dirty="0">
-                <a:solidFill>
-                  <a:srgbClr val="2C2C2C"/>
-                </a:solidFill>
-                <a:latin typeface="Verdana" pitchFamily="34" charset="0"/>
-                <a:ea typeface="Verdana" pitchFamily="34" charset="-122"/>
-                <a:cs typeface="Verdana" pitchFamily="34" charset="-120"/>
-              </a:rPr>
-              <a:t>tāḍāsana</a:t>
-            </a:r>
-            <a:pPr algn="l" indent="0" marL="0">
-              <a:lnSpc>
-                <a:spcPts val="1680"/>
-              </a:lnSpc>
-              <a:spcBef>
-                <a:spcPts val="300"/>
-              </a:spcBef>
-              <a:spcAft>
-                <a:spcPts val="300"/>
-              </a:spcAft>
-              <a:buNone/>
-            </a:pPr>
-            <a:r>
-              <a:rPr lang="en-US" sz="1200" dirty="0">
-                <a:solidFill>
-                  <a:srgbClr val="2C2C2C"/>
-                </a:solidFill>
-                <a:latin typeface="Verdana" pitchFamily="34" charset="0"/>
-                <a:ea typeface="Verdana" pitchFamily="34" charset="-122"/>
-                <a:cs typeface="Verdana" pitchFamily="34" charset="-120"/>
-              </a:rPr>
-              <a:t> (mountain pose).</a:t>
-            </a:r>
-            <a:endParaRPr lang="en-US" sz="1200" dirty="0"/>
-          </a:p>
-        </p:txBody>
-      </p:sp>
-      <p:sp>
-        <p:nvSpPr>
-          <p:cNvPr id="7" name="Text 5"/>
-          <p:cNvSpPr/>
-          <p:nvPr/>
-        </p:nvSpPr>
-        <p:spPr>
-          <a:xfrm>
             <a:off x="406301" y="4434929"/>
             <a:ext cx="8498026" cy="213271"/>
           </a:xfrm>
@@ -2251,7 +2287,7 @@
                 <a:ea typeface="Georgia" pitchFamily="34" charset="-122"/>
                 <a:cs typeface="Georgia" pitchFamily="34" charset="-120"/>
               </a:rPr>
-              <a:t>Differentiation</a:t>
+              <a:t>Close (5 min)</a:t>
             </a:r>
             <a:endParaRPr lang="en-US" sz="1800" dirty="0"/>
           </a:p>
@@ -2265,8 +2301,8 @@
         </p:nvSpPr>
         <p:spPr>
           <a:xfrm>
-            <a:off x="634901" y="883593"/>
-            <a:ext cx="8102798" cy="525661"/>
+            <a:off x="406301" y="870942"/>
+            <a:ext cx="8498026" cy="213271"/>
           </a:xfrm>
           <a:prstGeom prst="rect">
             <a:avLst/>
@@ -2278,18 +2314,20 @@
           <a:bodyPr wrap="square" lIns="0" tIns="0" rIns="0" bIns="0" rtlCol="0" anchor="t"/>
           <a:lstStyle/>
           <a:p>
-            <a:pPr algn="l" marL="342900" indent="-342900">
-              <a:lnSpc>
-                <a:spcPts val="1620"/>
-              </a:lnSpc>
-              <a:spcAft>
-                <a:spcPts val="300"/>
-              </a:spcAft>
-              <a:buSzPct val="100000"/>
-              <a:buChar char="•"/>
-            </a:pPr>
-            <a:r>
-              <a:rPr lang="en-US" sz="1200" b="1" dirty="0">
+            <a:pPr algn="l" indent="0" marL="0">
+              <a:lnSpc>
+                <a:spcPts val="1680"/>
+              </a:lnSpc>
+              <a:spcBef>
+                <a:spcPts val="300"/>
+              </a:spcBef>
+              <a:spcAft>
+                <a:spcPts val="300"/>
+              </a:spcAft>
+              <a:buNone/>
+            </a:pPr>
+            <a:r>
+              <a:rPr lang="en-US" sz="1200" dirty="0">
                 <a:solidFill>
                   <a:srgbClr val="2C2C2C"/>
                 </a:solidFill>
@@ -2297,19 +2335,22 @@
                 <a:ea typeface="Verdana" pitchFamily="34" charset="-122"/>
                 <a:cs typeface="Verdana" pitchFamily="34" charset="-120"/>
               </a:rPr>
-              <a:t>Tier up:</a:t>
+              <a:t>Tāḍāsana one more time. Then sit. Hands together at heart. </a:t>
             </a:r>
             <a:pPr algn="l" indent="0" marL="0">
               <a:lnSpc>
-                <a:spcPts val="1620"/>
-              </a:lnSpc>
-              <a:spcAft>
-                <a:spcPts val="300"/>
-              </a:spcAft>
-              <a:buNone/>
-            </a:pPr>
-            <a:r>
-              <a:rPr lang="en-US" sz="1200" dirty="0">
+                <a:spcPts val="1680"/>
+              </a:lnSpc>
+              <a:spcBef>
+                <a:spcPts val="300"/>
+              </a:spcBef>
+              <a:spcAft>
+                <a:spcPts val="300"/>
+              </a:spcAft>
+              <a:buNone/>
+            </a:pPr>
+            <a:r>
+              <a:rPr lang="en-US" sz="1200" i="1" dirty="0">
                 <a:solidFill>
                   <a:srgbClr val="2C2C2C"/>
                 </a:solidFill>
@@ -2317,23 +2358,22 @@
                 <a:ea typeface="Verdana" pitchFamily="34" charset="-122"/>
                 <a:cs typeface="Verdana" pitchFamily="34" charset="-120"/>
               </a:rPr>
-              <a:t> Hold for 60 seconds. Add "soft eyes looking ahead."</a:t>
-            </a:r>
-            <a:endParaRPr lang="en-US" sz="1200" dirty="0"/>
-          </a:p>
-          <a:p>
-            <a:pPr algn="l" marL="342900" indent="-342900">
-              <a:lnSpc>
-                <a:spcPts val="1620"/>
-              </a:lnSpc>
-              <a:spcAft>
-                <a:spcPts val="300"/>
-              </a:spcAft>
-              <a:buSzPct val="100000"/>
-              <a:buChar char="•"/>
-            </a:pPr>
-            <a:r>
-              <a:rPr lang="en-US" sz="1200" b="1" dirty="0">
+              <a:t>"Namaste"</a:t>
+            </a:r>
+            <a:pPr algn="l" indent="0" marL="0">
+              <a:lnSpc>
+                <a:spcPts val="1680"/>
+              </a:lnSpc>
+              <a:spcBef>
+                <a:spcPts val="300"/>
+              </a:spcBef>
+              <a:spcAft>
+                <a:spcPts val="300"/>
+              </a:spcAft>
+              <a:buNone/>
+            </a:pPr>
+            <a:r>
+              <a:rPr lang="en-US" sz="1200" dirty="0">
                 <a:solidFill>
                   <a:srgbClr val="2C2C2C"/>
                 </a:solidFill>
@@ -2341,19 +2381,22 @@
                 <a:ea typeface="Verdana" pitchFamily="34" charset="-122"/>
                 <a:cs typeface="Verdana" pitchFamily="34" charset="-120"/>
               </a:rPr>
-              <a:t>Tier down:</a:t>
+              <a:t> — </a:t>
             </a:r>
             <a:pPr algn="l" indent="0" marL="0">
               <a:lnSpc>
-                <a:spcPts val="1620"/>
-              </a:lnSpc>
-              <a:spcAft>
-                <a:spcPts val="300"/>
-              </a:spcAft>
-              <a:buNone/>
-            </a:pPr>
-            <a:r>
-              <a:rPr lang="en-US" sz="1200" dirty="0">
+                <a:spcPts val="1680"/>
+              </a:lnSpc>
+              <a:spcBef>
+                <a:spcPts val="300"/>
+              </a:spcBef>
+              <a:spcAft>
+                <a:spcPts val="300"/>
+              </a:spcAft>
+              <a:buNone/>
+            </a:pPr>
+            <a:r>
+              <a:rPr lang="en-US" sz="1200" i="1" dirty="0">
                 <a:solidFill>
                   <a:srgbClr val="2C2C2C"/>
                 </a:solidFill>
@@ -2361,7 +2404,7 @@
                 <a:ea typeface="Verdana" pitchFamily="34" charset="-122"/>
                 <a:cs typeface="Verdana" pitchFamily="34" charset="-120"/>
               </a:rPr>
-              <a:t> Hold for 15 seconds. Lean on a wall if needed.</a:t>
+              <a:t>"I bow to you."</a:t>
             </a:r>
             <a:endParaRPr lang="en-US" sz="1200" dirty="0"/>
           </a:p>
@@ -2519,7 +2562,7 @@
                 <a:ea typeface="Georgia" pitchFamily="34" charset="-122"/>
                 <a:cs typeface="Georgia" pitchFamily="34" charset="-120"/>
               </a:rPr>
-              <a:t>Teacher's quick notes</a:t>
+              <a:t>Homework</a:t>
             </a:r>
             <a:endParaRPr lang="en-US" sz="1800" dirty="0"/>
           </a:p>
@@ -2533,8 +2576,8 @@
         </p:nvSpPr>
         <p:spPr>
           <a:xfrm>
-            <a:off x="406301" y="870942"/>
-            <a:ext cx="8498026" cy="426541"/>
+            <a:off x="634901" y="883593"/>
+            <a:ext cx="8102798" cy="281880"/>
           </a:xfrm>
           <a:prstGeom prst="rect">
             <a:avLst/>
@@ -2546,17 +2589,15 @@
           <a:bodyPr wrap="square" lIns="0" tIns="0" rIns="0" bIns="0" rtlCol="0" anchor="t"/>
           <a:lstStyle/>
           <a:p>
-            <a:pPr algn="l" indent="0" marL="0">
-              <a:lnSpc>
-                <a:spcPts val="1680"/>
-              </a:lnSpc>
-              <a:spcBef>
-                <a:spcPts val="300"/>
-              </a:spcBef>
-              <a:spcAft>
-                <a:spcPts val="300"/>
-              </a:spcAft>
-              <a:buNone/>
+            <a:pPr algn="l" marL="342900" indent="-342900">
+              <a:lnSpc>
+                <a:spcPts val="1620"/>
+              </a:lnSpc>
+              <a:spcAft>
+                <a:spcPts val="300"/>
+              </a:spcAft>
+              <a:buSzPct val="100000"/>
+              <a:buChar char="•"/>
             </a:pPr>
             <a:r>
               <a:rPr lang="en-US" sz="1200" dirty="0">
@@ -2567,7 +2608,503 @@
                 <a:ea typeface="Verdana" pitchFamily="34" charset="-122"/>
                 <a:cs typeface="Verdana" pitchFamily="34" charset="-120"/>
               </a:rPr>
-              <a:t>– This is the foundational pose for the whole module. Use it to open and close every class. – Some children will fidget. Allow gentle sway — mountains in nature aren't perfectly still either.</a:t>
+              <a:t>Stand like a mountain for 30 seconds before brushing your teeth tomorrow.</a:t>
+            </a:r>
+            <a:endParaRPr lang="en-US" sz="1200" dirty="0"/>
+          </a:p>
+        </p:txBody>
+      </p:sp>
+      <p:sp>
+        <p:nvSpPr>
+          <p:cNvPr id="5" name="Text 3"/>
+          <p:cNvSpPr/>
+          <p:nvPr/>
+        </p:nvSpPr>
+        <p:spPr>
+          <a:xfrm>
+            <a:off x="406301" y="4434929"/>
+            <a:ext cx="8498026" cy="213271"/>
+          </a:xfrm>
+          <a:prstGeom prst="rect">
+            <a:avLst/>
+          </a:prstGeom>
+          <a:noFill/>
+          <a:ln/>
+        </p:spPr>
+        <p:txBody>
+          <a:bodyPr wrap="square" lIns="0" tIns="0" rIns="0" bIns="0" rtlCol="0" anchor="t"/>
+          <a:lstStyle/>
+          <a:p>
+            <a:pPr algn="l" indent="0" marL="0">
+              <a:lnSpc>
+                <a:spcPts val="1680"/>
+              </a:lnSpc>
+              <a:spcBef>
+                <a:spcPts val="300"/>
+              </a:spcBef>
+              <a:spcAft>
+                <a:spcPts val="300"/>
+              </a:spcAft>
+              <a:buNone/>
+            </a:pPr>
+            <a:r>
+              <a:rPr lang="en-US" sz="1200" dirty="0">
+                <a:solidFill>
+                  <a:srgbClr val="2C2C2C"/>
+                </a:solidFill>
+                <a:latin typeface="Verdana" pitchFamily="34" charset="0"/>
+                <a:ea typeface="Verdana" pitchFamily="34" charset="-122"/>
+                <a:cs typeface="Verdana" pitchFamily="34" charset="-120"/>
+              </a:rPr>
+              <a:t>Primary ·  · IKS Curriculum</a:t>
+            </a:r>
+            <a:endParaRPr lang="en-US" sz="1200" dirty="0"/>
+          </a:p>
+        </p:txBody>
+      </p:sp>
+    </p:spTree>
+  </p:cSld>
+  <p:clrMapOvr>
+    <a:masterClrMapping/>
+  </p:clrMapOvr>
+</p:sld>
+</file>
+
+<file path=ppt/slides/slide12.xml><?xml version="1.0" encoding="utf-8"?>
+<p:sld xmlns:a="http://schemas.openxmlformats.org/drawingml/2006/main" xmlns:r="http://schemas.openxmlformats.org/officeDocument/2006/relationships" xmlns:p="http://schemas.openxmlformats.org/presentationml/2006/main">
+  <p:cSld name="Slide 12">
+    <p:bg>
+      <p:bgPr>
+        <a:solidFill>
+          <a:srgbClr val="FAF7F2"/>
+        </a:solidFill>
+      </p:bgPr>
+    </p:bg>
+    <p:spTree>
+      <p:nvGrpSpPr>
+        <p:cNvPr id="1" name=""/>
+        <p:cNvGrpSpPr/>
+        <p:nvPr/>
+      </p:nvGrpSpPr>
+      <p:grpSpPr>
+        <a:xfrm>
+          <a:off x="0" y="0"/>
+          <a:ext cx="0" cy="0"/>
+          <a:chOff x="0" y="0"/>
+          <a:chExt cx="0" cy="0"/>
+        </a:xfrm>
+      </p:grpSpPr>
+      <p:sp>
+        <p:nvSpPr>
+          <p:cNvPr id="2" name="Text 0"/>
+          <p:cNvSpPr/>
+          <p:nvPr/>
+        </p:nvSpPr>
+        <p:spPr>
+          <a:xfrm>
+            <a:off x="0" y="0"/>
+            <a:ext cx="9144000" cy="101501"/>
+          </a:xfrm>
+          <a:prstGeom prst="rect">
+            <a:avLst/>
+          </a:prstGeom>
+          <a:solidFill>
+            <a:srgbClr val="87A96B"/>
+          </a:solidFill>
+          <a:ln/>
+        </p:spPr>
+        <p:txBody>
+          <a:bodyPr wrap="square" rtlCol="0" anchor="ctr"/>
+          <a:lstStyle/>
+          <a:p>
+            <a:pPr indent="0" marL="0">
+              <a:buNone/>
+            </a:pPr>
+            <a:endParaRPr lang="en-US" dirty="0"/>
+          </a:p>
+        </p:txBody>
+      </p:sp>
+      <p:sp>
+        <p:nvSpPr>
+          <p:cNvPr id="3" name="Text 1"/>
+          <p:cNvSpPr/>
+          <p:nvPr/>
+        </p:nvSpPr>
+        <p:spPr>
+          <a:xfrm>
+            <a:off x="406301" y="457051"/>
+            <a:ext cx="8498026" cy="274290"/>
+          </a:xfrm>
+          <a:prstGeom prst="rect">
+            <a:avLst/>
+          </a:prstGeom>
+          <a:noFill/>
+          <a:ln/>
+        </p:spPr>
+        <p:txBody>
+          <a:bodyPr wrap="square" lIns="0" tIns="0" rIns="0" bIns="0" rtlCol="0" anchor="t"/>
+          <a:lstStyle/>
+          <a:p>
+            <a:pPr algn="l" indent="0" marL="0">
+              <a:lnSpc>
+                <a:spcPts val="2160"/>
+              </a:lnSpc>
+              <a:spcBef>
+                <a:spcPts val="600"/>
+              </a:spcBef>
+              <a:spcAft>
+                <a:spcPts val="800"/>
+              </a:spcAft>
+              <a:buNone/>
+            </a:pPr>
+            <a:r>
+              <a:rPr lang="en-US" sz="1800" b="1" dirty="0">
+                <a:solidFill>
+                  <a:srgbClr val="E07A5F"/>
+                </a:solidFill>
+                <a:latin typeface="Georgia" pitchFamily="34" charset="0"/>
+                <a:ea typeface="Georgia" pitchFamily="34" charset="-122"/>
+                <a:cs typeface="Georgia" pitchFamily="34" charset="-120"/>
+              </a:rPr>
+              <a:t>Differentiation</a:t>
+            </a:r>
+            <a:endParaRPr lang="en-US" sz="1800" dirty="0"/>
+          </a:p>
+        </p:txBody>
+      </p:sp>
+      <p:sp>
+        <p:nvSpPr>
+          <p:cNvPr id="4" name="Text 2"/>
+          <p:cNvSpPr/>
+          <p:nvPr/>
+        </p:nvSpPr>
+        <p:spPr>
+          <a:xfrm>
+            <a:off x="634901" y="883593"/>
+            <a:ext cx="8102798" cy="525661"/>
+          </a:xfrm>
+          <a:prstGeom prst="rect">
+            <a:avLst/>
+          </a:prstGeom>
+          <a:noFill/>
+          <a:ln/>
+        </p:spPr>
+        <p:txBody>
+          <a:bodyPr wrap="square" lIns="0" tIns="0" rIns="0" bIns="0" rtlCol="0" anchor="t"/>
+          <a:lstStyle/>
+          <a:p>
+            <a:pPr algn="l" marL="342900" indent="-342900">
+              <a:lnSpc>
+                <a:spcPts val="1620"/>
+              </a:lnSpc>
+              <a:spcAft>
+                <a:spcPts val="300"/>
+              </a:spcAft>
+              <a:buSzPct val="100000"/>
+              <a:buChar char="•"/>
+            </a:pPr>
+            <a:r>
+              <a:rPr lang="en-US" sz="1200" b="1" dirty="0">
+                <a:solidFill>
+                  <a:srgbClr val="2C2C2C"/>
+                </a:solidFill>
+                <a:latin typeface="Verdana" pitchFamily="34" charset="0"/>
+                <a:ea typeface="Verdana" pitchFamily="34" charset="-122"/>
+                <a:cs typeface="Verdana" pitchFamily="34" charset="-120"/>
+              </a:rPr>
+              <a:t>Tier up:</a:t>
+            </a:r>
+            <a:pPr algn="l" indent="0" marL="0">
+              <a:lnSpc>
+                <a:spcPts val="1620"/>
+              </a:lnSpc>
+              <a:spcAft>
+                <a:spcPts val="300"/>
+              </a:spcAft>
+              <a:buNone/>
+            </a:pPr>
+            <a:r>
+              <a:rPr lang="en-US" sz="1200" dirty="0">
+                <a:solidFill>
+                  <a:srgbClr val="2C2C2C"/>
+                </a:solidFill>
+                <a:latin typeface="Verdana" pitchFamily="34" charset="0"/>
+                <a:ea typeface="Verdana" pitchFamily="34" charset="-122"/>
+                <a:cs typeface="Verdana" pitchFamily="34" charset="-120"/>
+              </a:rPr>
+              <a:t> Hold for 60 seconds. Add "soft eyes looking ahead."</a:t>
+            </a:r>
+            <a:endParaRPr lang="en-US" sz="1200" dirty="0"/>
+          </a:p>
+          <a:p>
+            <a:pPr algn="l" marL="342900" indent="-342900">
+              <a:lnSpc>
+                <a:spcPts val="1620"/>
+              </a:lnSpc>
+              <a:spcAft>
+                <a:spcPts val="300"/>
+              </a:spcAft>
+              <a:buSzPct val="100000"/>
+              <a:buChar char="•"/>
+            </a:pPr>
+            <a:r>
+              <a:rPr lang="en-US" sz="1200" b="1" dirty="0">
+                <a:solidFill>
+                  <a:srgbClr val="2C2C2C"/>
+                </a:solidFill>
+                <a:latin typeface="Verdana" pitchFamily="34" charset="0"/>
+                <a:ea typeface="Verdana" pitchFamily="34" charset="-122"/>
+                <a:cs typeface="Verdana" pitchFamily="34" charset="-120"/>
+              </a:rPr>
+              <a:t>Tier down:</a:t>
+            </a:r>
+            <a:pPr algn="l" indent="0" marL="0">
+              <a:lnSpc>
+                <a:spcPts val="1620"/>
+              </a:lnSpc>
+              <a:spcAft>
+                <a:spcPts val="300"/>
+              </a:spcAft>
+              <a:buNone/>
+            </a:pPr>
+            <a:r>
+              <a:rPr lang="en-US" sz="1200" dirty="0">
+                <a:solidFill>
+                  <a:srgbClr val="2C2C2C"/>
+                </a:solidFill>
+                <a:latin typeface="Verdana" pitchFamily="34" charset="0"/>
+                <a:ea typeface="Verdana" pitchFamily="34" charset="-122"/>
+                <a:cs typeface="Verdana" pitchFamily="34" charset="-120"/>
+              </a:rPr>
+              <a:t> Hold for 15 seconds. Lean on a wall if needed.</a:t>
+            </a:r>
+            <a:endParaRPr lang="en-US" sz="1200" dirty="0"/>
+          </a:p>
+        </p:txBody>
+      </p:sp>
+      <p:sp>
+        <p:nvSpPr>
+          <p:cNvPr id="5" name="Text 3"/>
+          <p:cNvSpPr/>
+          <p:nvPr/>
+        </p:nvSpPr>
+        <p:spPr>
+          <a:xfrm>
+            <a:off x="406301" y="4434929"/>
+            <a:ext cx="8498026" cy="213271"/>
+          </a:xfrm>
+          <a:prstGeom prst="rect">
+            <a:avLst/>
+          </a:prstGeom>
+          <a:noFill/>
+          <a:ln/>
+        </p:spPr>
+        <p:txBody>
+          <a:bodyPr wrap="square" lIns="0" tIns="0" rIns="0" bIns="0" rtlCol="0" anchor="t"/>
+          <a:lstStyle/>
+          <a:p>
+            <a:pPr algn="l" indent="0" marL="0">
+              <a:lnSpc>
+                <a:spcPts val="1680"/>
+              </a:lnSpc>
+              <a:spcBef>
+                <a:spcPts val="300"/>
+              </a:spcBef>
+              <a:spcAft>
+                <a:spcPts val="300"/>
+              </a:spcAft>
+              <a:buNone/>
+            </a:pPr>
+            <a:r>
+              <a:rPr lang="en-US" sz="1200" dirty="0">
+                <a:solidFill>
+                  <a:srgbClr val="2C2C2C"/>
+                </a:solidFill>
+                <a:latin typeface="Verdana" pitchFamily="34" charset="0"/>
+                <a:ea typeface="Verdana" pitchFamily="34" charset="-122"/>
+                <a:cs typeface="Verdana" pitchFamily="34" charset="-120"/>
+              </a:rPr>
+              <a:t>Primary ·  · IKS Curriculum</a:t>
+            </a:r>
+            <a:endParaRPr lang="en-US" sz="1200" dirty="0"/>
+          </a:p>
+        </p:txBody>
+      </p:sp>
+    </p:spTree>
+  </p:cSld>
+  <p:clrMapOvr>
+    <a:masterClrMapping/>
+  </p:clrMapOvr>
+</p:sld>
+</file>
+
+<file path=ppt/slides/slide13.xml><?xml version="1.0" encoding="utf-8"?>
+<p:sld xmlns:a="http://schemas.openxmlformats.org/drawingml/2006/main" xmlns:r="http://schemas.openxmlformats.org/officeDocument/2006/relationships" xmlns:p="http://schemas.openxmlformats.org/presentationml/2006/main">
+  <p:cSld name="Slide 13">
+    <p:bg>
+      <p:bgPr>
+        <a:solidFill>
+          <a:srgbClr val="FAF7F2"/>
+        </a:solidFill>
+      </p:bgPr>
+    </p:bg>
+    <p:spTree>
+      <p:nvGrpSpPr>
+        <p:cNvPr id="1" name=""/>
+        <p:cNvGrpSpPr/>
+        <p:nvPr/>
+      </p:nvGrpSpPr>
+      <p:grpSpPr>
+        <a:xfrm>
+          <a:off x="0" y="0"/>
+          <a:ext cx="0" cy="0"/>
+          <a:chOff x="0" y="0"/>
+          <a:chExt cx="0" cy="0"/>
+        </a:xfrm>
+      </p:grpSpPr>
+      <p:sp>
+        <p:nvSpPr>
+          <p:cNvPr id="2" name="Text 0"/>
+          <p:cNvSpPr/>
+          <p:nvPr/>
+        </p:nvSpPr>
+        <p:spPr>
+          <a:xfrm>
+            <a:off x="0" y="0"/>
+            <a:ext cx="9144000" cy="101501"/>
+          </a:xfrm>
+          <a:prstGeom prst="rect">
+            <a:avLst/>
+          </a:prstGeom>
+          <a:solidFill>
+            <a:srgbClr val="87A96B"/>
+          </a:solidFill>
+          <a:ln/>
+        </p:spPr>
+        <p:txBody>
+          <a:bodyPr wrap="square" rtlCol="0" anchor="ctr"/>
+          <a:lstStyle/>
+          <a:p>
+            <a:pPr indent="0" marL="0">
+              <a:buNone/>
+            </a:pPr>
+            <a:endParaRPr lang="en-US" dirty="0"/>
+          </a:p>
+        </p:txBody>
+      </p:sp>
+      <p:sp>
+        <p:nvSpPr>
+          <p:cNvPr id="3" name="Text 1"/>
+          <p:cNvSpPr/>
+          <p:nvPr/>
+        </p:nvSpPr>
+        <p:spPr>
+          <a:xfrm>
+            <a:off x="406301" y="457051"/>
+            <a:ext cx="8498026" cy="274290"/>
+          </a:xfrm>
+          <a:prstGeom prst="rect">
+            <a:avLst/>
+          </a:prstGeom>
+          <a:noFill/>
+          <a:ln/>
+        </p:spPr>
+        <p:txBody>
+          <a:bodyPr wrap="square" lIns="0" tIns="0" rIns="0" bIns="0" rtlCol="0" anchor="t"/>
+          <a:lstStyle/>
+          <a:p>
+            <a:pPr algn="l" indent="0" marL="0">
+              <a:lnSpc>
+                <a:spcPts val="2160"/>
+              </a:lnSpc>
+              <a:spcBef>
+                <a:spcPts val="600"/>
+              </a:spcBef>
+              <a:spcAft>
+                <a:spcPts val="800"/>
+              </a:spcAft>
+              <a:buNone/>
+            </a:pPr>
+            <a:r>
+              <a:rPr lang="en-US" sz="1800" b="1" dirty="0">
+                <a:solidFill>
+                  <a:srgbClr val="E07A5F"/>
+                </a:solidFill>
+                <a:latin typeface="Georgia" pitchFamily="34" charset="0"/>
+                <a:ea typeface="Georgia" pitchFamily="34" charset="-122"/>
+                <a:cs typeface="Georgia" pitchFamily="34" charset="-120"/>
+              </a:rPr>
+              <a:t>Teacher's quick notes</a:t>
+            </a:r>
+            <a:endParaRPr lang="en-US" sz="1800" dirty="0"/>
+          </a:p>
+        </p:txBody>
+      </p:sp>
+      <p:sp>
+        <p:nvSpPr>
+          <p:cNvPr id="4" name="Text 2"/>
+          <p:cNvSpPr/>
+          <p:nvPr/>
+        </p:nvSpPr>
+        <p:spPr>
+          <a:xfrm>
+            <a:off x="634901" y="883593"/>
+            <a:ext cx="8102798" cy="525661"/>
+          </a:xfrm>
+          <a:prstGeom prst="rect">
+            <a:avLst/>
+          </a:prstGeom>
+          <a:noFill/>
+          <a:ln/>
+        </p:spPr>
+        <p:txBody>
+          <a:bodyPr wrap="square" lIns="0" tIns="0" rIns="0" bIns="0" rtlCol="0" anchor="t"/>
+          <a:lstStyle/>
+          <a:p>
+            <a:pPr algn="l" marL="342900" indent="-342900">
+              <a:lnSpc>
+                <a:spcPts val="1620"/>
+              </a:lnSpc>
+              <a:spcAft>
+                <a:spcPts val="300"/>
+              </a:spcAft>
+              <a:buSzPct val="100000"/>
+              <a:buChar char="•"/>
+            </a:pPr>
+            <a:r>
+              <a:rPr lang="en-US" sz="1200" dirty="0">
+                <a:solidFill>
+                  <a:srgbClr val="2C2C2C"/>
+                </a:solidFill>
+                <a:latin typeface="Verdana" pitchFamily="34" charset="0"/>
+                <a:ea typeface="Verdana" pitchFamily="34" charset="-122"/>
+                <a:cs typeface="Verdana" pitchFamily="34" charset="-120"/>
+              </a:rPr>
+              <a:t>This is the foundational pose for the whole module. Use it to open and close every class.</a:t>
+            </a:r>
+            <a:endParaRPr lang="en-US" sz="1200" dirty="0"/>
+          </a:p>
+          <a:p>
+            <a:pPr algn="l" marL="342900" indent="-342900">
+              <a:lnSpc>
+                <a:spcPts val="1620"/>
+              </a:lnSpc>
+              <a:spcAft>
+                <a:spcPts val="300"/>
+              </a:spcAft>
+              <a:buSzPct val="100000"/>
+              <a:buChar char="•"/>
+            </a:pPr>
+            <a:r>
+              <a:rPr lang="en-US" sz="1200" dirty="0">
+                <a:solidFill>
+                  <a:srgbClr val="2C2C2C"/>
+                </a:solidFill>
+                <a:latin typeface="Verdana" pitchFamily="34" charset="0"/>
+                <a:ea typeface="Verdana" pitchFamily="34" charset="-122"/>
+                <a:cs typeface="Verdana" pitchFamily="34" charset="-120"/>
+              </a:rPr>
+              <a:t>Some children will fidget. Allow gentle sway — mountains in nature aren't perfectly still either.</a:t>
             </a:r>
             <a:endParaRPr lang="en-US" sz="1200" dirty="0"/>
           </a:p>
@@ -2725,7 +3262,7 @@
                 <a:ea typeface="Georgia" pitchFamily="34" charset="-122"/>
                 <a:cs typeface="Georgia" pitchFamily="34" charset="-120"/>
               </a:rPr>
-              <a:t>Materials</a:t>
+              <a:t>Goal</a:t>
             </a:r>
             <a:endParaRPr lang="en-US" sz="1800" dirty="0"/>
           </a:p>
@@ -2773,7 +3310,53 @@
                 <a:ea typeface="Verdana" pitchFamily="34" charset="-122"/>
                 <a:cs typeface="Verdana" pitchFamily="34" charset="-120"/>
               </a:rPr>
-              <a:t>– Mats / floor space – A picture of a mountain</a:t>
+              <a:t>Children meet yoga through a story and stand in </a:t>
+            </a:r>
+            <a:pPr algn="l" indent="0" marL="0">
+              <a:lnSpc>
+                <a:spcPts val="1680"/>
+              </a:lnSpc>
+              <a:spcBef>
+                <a:spcPts val="300"/>
+              </a:spcBef>
+              <a:spcAft>
+                <a:spcPts val="300"/>
+              </a:spcAft>
+              <a:buNone/>
+            </a:pPr>
+            <a:r>
+              <a:rPr lang="en-US" sz="1200" i="1" dirty="0">
+                <a:solidFill>
+                  <a:srgbClr val="2C2C2C"/>
+                </a:solidFill>
+                <a:latin typeface="Verdana" pitchFamily="34" charset="0"/>
+                <a:ea typeface="Verdana" pitchFamily="34" charset="-122"/>
+                <a:cs typeface="Verdana" pitchFamily="34" charset="-120"/>
+              </a:rPr>
+              <a:t>tāḍāsana</a:t>
+            </a:r>
+            <a:pPr algn="l" indent="0" marL="0">
+              <a:lnSpc>
+                <a:spcPts val="1680"/>
+              </a:lnSpc>
+              <a:spcBef>
+                <a:spcPts val="300"/>
+              </a:spcBef>
+              <a:spcAft>
+                <a:spcPts val="300"/>
+              </a:spcAft>
+              <a:buNone/>
+            </a:pPr>
+            <a:r>
+              <a:rPr lang="en-US" sz="1200" dirty="0">
+                <a:solidFill>
+                  <a:srgbClr val="2C2C2C"/>
+                </a:solidFill>
+                <a:latin typeface="Verdana" pitchFamily="34" charset="0"/>
+                <a:ea typeface="Verdana" pitchFamily="34" charset="-122"/>
+                <a:cs typeface="Verdana" pitchFamily="34" charset="-120"/>
+              </a:rPr>
+              <a:t> (mountain pose).</a:t>
             </a:r>
             <a:endParaRPr lang="en-US" sz="1200" dirty="0"/>
           </a:p>
@@ -2931,7 +3514,7 @@
                 <a:ea typeface="Georgia" pitchFamily="34" charset="-122"/>
                 <a:cs typeface="Georgia" pitchFamily="34" charset="-120"/>
               </a:rPr>
-              <a:t>The flow</a:t>
+              <a:t>Materials</a:t>
             </a:r>
             <a:endParaRPr lang="en-US" sz="1800" dirty="0"/>
           </a:p>
@@ -2940,6 +3523,76 @@
       <p:sp>
         <p:nvSpPr>
           <p:cNvPr id="4" name="Text 2"/>
+          <p:cNvSpPr/>
+          <p:nvPr/>
+        </p:nvSpPr>
+        <p:spPr>
+          <a:xfrm>
+            <a:off x="634901" y="883593"/>
+            <a:ext cx="8102798" cy="525661"/>
+          </a:xfrm>
+          <a:prstGeom prst="rect">
+            <a:avLst/>
+          </a:prstGeom>
+          <a:noFill/>
+          <a:ln/>
+        </p:spPr>
+        <p:txBody>
+          <a:bodyPr wrap="square" lIns="0" tIns="0" rIns="0" bIns="0" rtlCol="0" anchor="t"/>
+          <a:lstStyle/>
+          <a:p>
+            <a:pPr algn="l" marL="342900" indent="-342900">
+              <a:lnSpc>
+                <a:spcPts val="1620"/>
+              </a:lnSpc>
+              <a:spcAft>
+                <a:spcPts val="300"/>
+              </a:spcAft>
+              <a:buSzPct val="100000"/>
+              <a:buChar char="•"/>
+            </a:pPr>
+            <a:r>
+              <a:rPr lang="en-US" sz="1200" dirty="0">
+                <a:solidFill>
+                  <a:srgbClr val="2C2C2C"/>
+                </a:solidFill>
+                <a:latin typeface="Verdana" pitchFamily="34" charset="0"/>
+                <a:ea typeface="Verdana" pitchFamily="34" charset="-122"/>
+                <a:cs typeface="Verdana" pitchFamily="34" charset="-120"/>
+              </a:rPr>
+              <a:t>Mats / floor space</a:t>
+            </a:r>
+            <a:endParaRPr lang="en-US" sz="1200" dirty="0"/>
+          </a:p>
+          <a:p>
+            <a:pPr algn="l" marL="342900" indent="-342900">
+              <a:lnSpc>
+                <a:spcPts val="1620"/>
+              </a:lnSpc>
+              <a:spcAft>
+                <a:spcPts val="300"/>
+              </a:spcAft>
+              <a:buSzPct val="100000"/>
+              <a:buChar char="•"/>
+            </a:pPr>
+            <a:r>
+              <a:rPr lang="en-US" sz="1200" dirty="0">
+                <a:solidFill>
+                  <a:srgbClr val="2C2C2C"/>
+                </a:solidFill>
+                <a:latin typeface="Verdana" pitchFamily="34" charset="0"/>
+                <a:ea typeface="Verdana" pitchFamily="34" charset="-122"/>
+                <a:cs typeface="Verdana" pitchFamily="34" charset="-120"/>
+              </a:rPr>
+              <a:t>A picture of a mountain</a:t>
+            </a:r>
+            <a:endParaRPr lang="en-US" sz="1200" dirty="0"/>
+          </a:p>
+        </p:txBody>
+      </p:sp>
+      <p:sp>
+        <p:nvSpPr>
+          <p:cNvPr id="5" name="Text 3"/>
           <p:cNvSpPr/>
           <p:nvPr/>
         </p:nvSpPr>
@@ -3089,7 +3742,7 @@
                 <a:ea typeface="Georgia" pitchFamily="34" charset="-122"/>
                 <a:cs typeface="Georgia" pitchFamily="34" charset="-120"/>
               </a:rPr>
-              <a:t>Settle (3 min)</a:t>
+              <a:t>The flow</a:t>
             </a:r>
             <a:endParaRPr lang="en-US" sz="1800" dirty="0"/>
           </a:p>
@@ -3098,54 +3751,6 @@
       <p:sp>
         <p:nvSpPr>
           <p:cNvPr id="4" name="Text 2"/>
-          <p:cNvSpPr/>
-          <p:nvPr/>
-        </p:nvSpPr>
-        <p:spPr>
-          <a:xfrm>
-            <a:off x="406301" y="870942"/>
-            <a:ext cx="8498026" cy="213271"/>
-          </a:xfrm>
-          <a:prstGeom prst="rect">
-            <a:avLst/>
-          </a:prstGeom>
-          <a:noFill/>
-          <a:ln/>
-        </p:spPr>
-        <p:txBody>
-          <a:bodyPr wrap="square" lIns="0" tIns="0" rIns="0" bIns="0" rtlCol="0" anchor="t"/>
-          <a:lstStyle/>
-          <a:p>
-            <a:pPr algn="l" indent="0" marL="0">
-              <a:lnSpc>
-                <a:spcPts val="1680"/>
-              </a:lnSpc>
-              <a:spcBef>
-                <a:spcPts val="300"/>
-              </a:spcBef>
-              <a:spcAft>
-                <a:spcPts val="300"/>
-              </a:spcAft>
-              <a:buNone/>
-            </a:pPr>
-            <a:r>
-              <a:rPr lang="en-US" sz="1200" dirty="0">
-                <a:solidFill>
-                  <a:srgbClr val="2C2C2C"/>
-                </a:solidFill>
-                <a:latin typeface="Verdana" pitchFamily="34" charset="0"/>
-                <a:ea typeface="Verdana" pitchFamily="34" charset="-122"/>
-                <a:cs typeface="Verdana" pitchFamily="34" charset="-120"/>
-              </a:rPr>
-              <a:t>Sit on mat, hands on knees. 5 natural breaths.</a:t>
-            </a:r>
-            <a:endParaRPr lang="en-US" sz="1200" dirty="0"/>
-          </a:p>
-        </p:txBody>
-      </p:sp>
-      <p:sp>
-        <p:nvSpPr>
-          <p:cNvPr id="5" name="Text 3"/>
           <p:cNvSpPr/>
           <p:nvPr/>
         </p:nvSpPr>
@@ -3295,7 +3900,7 @@
                 <a:ea typeface="Georgia" pitchFamily="34" charset="-122"/>
                 <a:cs typeface="Georgia" pitchFamily="34" charset="-120"/>
               </a:rPr>
-              <a:t>Story (5 min)</a:t>
+              <a:t>Settle (3 min)</a:t>
             </a:r>
             <a:endParaRPr lang="en-US" sz="1800" dirty="0"/>
           </a:p>
@@ -3310,7 +3915,7 @@
         <p:spPr>
           <a:xfrm>
             <a:off x="406301" y="870942"/>
-            <a:ext cx="8498026" cy="426541"/>
+            <a:ext cx="8498026" cy="213271"/>
           </a:xfrm>
           <a:prstGeom prst="rect">
             <a:avLst/>
@@ -3335,7 +3940,7 @@
               <a:buNone/>
             </a:pPr>
             <a:r>
-              <a:rPr lang="en-US" sz="1200" i="1" dirty="0">
+              <a:rPr lang="en-US" sz="1200" dirty="0">
                 <a:solidFill>
                   <a:srgbClr val="2C2C2C"/>
                 </a:solidFill>
@@ -3343,53 +3948,7 @@
                 <a:ea typeface="Verdana" pitchFamily="34" charset="-122"/>
                 <a:cs typeface="Verdana" pitchFamily="34" charset="-120"/>
               </a:rPr>
-              <a:t>"Yoga is a very old practice from India. It uses our bodies, our breath, and our mind — all together. The Sanskrit word </a:t>
-            </a:r>
-            <a:pPr algn="l" indent="0" marL="0">
-              <a:lnSpc>
-                <a:spcPts val="1680"/>
-              </a:lnSpc>
-              <a:spcBef>
-                <a:spcPts val="300"/>
-              </a:spcBef>
-              <a:spcAft>
-                <a:spcPts val="300"/>
-              </a:spcAft>
-              <a:buNone/>
-            </a:pPr>
-            <a:r>
-              <a:rPr lang="en-US" sz="1200" b="1" i="1" dirty="0">
-                <a:solidFill>
-                  <a:srgbClr val="2C2C2C"/>
-                </a:solidFill>
-                <a:latin typeface="Verdana" pitchFamily="34" charset="0"/>
-                <a:ea typeface="Verdana" pitchFamily="34" charset="-122"/>
-                <a:cs typeface="Verdana" pitchFamily="34" charset="-120"/>
-              </a:rPr>
-              <a:t>yoga</a:t>
-            </a:r>
-            <a:pPr algn="l" indent="0" marL="0">
-              <a:lnSpc>
-                <a:spcPts val="1680"/>
-              </a:lnSpc>
-              <a:spcBef>
-                <a:spcPts val="300"/>
-              </a:spcBef>
-              <a:spcAft>
-                <a:spcPts val="300"/>
-              </a:spcAft>
-              <a:buNone/>
-            </a:pPr>
-            <a:r>
-              <a:rPr lang="en-US" sz="1200" i="1" dirty="0">
-                <a:solidFill>
-                  <a:srgbClr val="2C2C2C"/>
-                </a:solidFill>
-                <a:latin typeface="Verdana" pitchFamily="34" charset="0"/>
-                <a:ea typeface="Verdana" pitchFamily="34" charset="-122"/>
-                <a:cs typeface="Verdana" pitchFamily="34" charset="-120"/>
-              </a:rPr>
-              <a:t> means 'to join.' We join body, breath, and mind."</a:t>
+              <a:t>Sit on mat, hands on knees. 5 natural breaths.</a:t>
             </a:r>
             <a:endParaRPr lang="en-US" sz="1200" dirty="0"/>
           </a:p>
@@ -3398,100 +3957,6 @@
       <p:sp>
         <p:nvSpPr>
           <p:cNvPr id="5" name="Text 3"/>
-          <p:cNvSpPr/>
-          <p:nvPr/>
-        </p:nvSpPr>
-        <p:spPr>
-          <a:xfrm>
-            <a:off x="406301" y="1373684"/>
-            <a:ext cx="8498026" cy="213271"/>
-          </a:xfrm>
-          <a:prstGeom prst="rect">
-            <a:avLst/>
-          </a:prstGeom>
-          <a:noFill/>
-          <a:ln/>
-        </p:spPr>
-        <p:txBody>
-          <a:bodyPr wrap="square" lIns="0" tIns="0" rIns="0" bIns="0" rtlCol="0" anchor="t"/>
-          <a:lstStyle/>
-          <a:p>
-            <a:pPr algn="l" indent="0" marL="0">
-              <a:lnSpc>
-                <a:spcPts val="1680"/>
-              </a:lnSpc>
-              <a:spcBef>
-                <a:spcPts val="300"/>
-              </a:spcBef>
-              <a:spcAft>
-                <a:spcPts val="300"/>
-              </a:spcAft>
-              <a:buNone/>
-            </a:pPr>
-            <a:r>
-              <a:rPr lang="en-US" sz="1200" i="1" dirty="0">
-                <a:solidFill>
-                  <a:srgbClr val="2C2C2C"/>
-                </a:solidFill>
-                <a:latin typeface="Verdana" pitchFamily="34" charset="0"/>
-                <a:ea typeface="Verdana" pitchFamily="34" charset="-122"/>
-                <a:cs typeface="Verdana" pitchFamily="34" charset="-120"/>
-              </a:rPr>
-              <a:t>"Today our pose is </a:t>
-            </a:r>
-            <a:pPr algn="l" indent="0" marL="0">
-              <a:lnSpc>
-                <a:spcPts val="1680"/>
-              </a:lnSpc>
-              <a:spcBef>
-                <a:spcPts val="300"/>
-              </a:spcBef>
-              <a:spcAft>
-                <a:spcPts val="300"/>
-              </a:spcAft>
-              <a:buNone/>
-            </a:pPr>
-            <a:r>
-              <a:rPr lang="en-US" sz="1200" b="1" i="1" dirty="0">
-                <a:solidFill>
-                  <a:srgbClr val="2C2C2C"/>
-                </a:solidFill>
-                <a:latin typeface="Verdana" pitchFamily="34" charset="0"/>
-                <a:ea typeface="Verdana" pitchFamily="34" charset="-122"/>
-                <a:cs typeface="Verdana" pitchFamily="34" charset="-120"/>
-              </a:rPr>
-              <a:t>tāḍāsana</a:t>
-            </a:r>
-            <a:pPr algn="l" indent="0" marL="0">
-              <a:lnSpc>
-                <a:spcPts val="1680"/>
-              </a:lnSpc>
-              <a:spcBef>
-                <a:spcPts val="300"/>
-              </a:spcBef>
-              <a:spcAft>
-                <a:spcPts val="300"/>
-              </a:spcAft>
-              <a:buNone/>
-            </a:pPr>
-            <a:r>
-              <a:rPr lang="en-US" sz="1200" i="1" dirty="0">
-                <a:solidFill>
-                  <a:srgbClr val="2C2C2C"/>
-                </a:solidFill>
-                <a:latin typeface="Verdana" pitchFamily="34" charset="0"/>
-                <a:ea typeface="Verdana" pitchFamily="34" charset="-122"/>
-                <a:cs typeface="Verdana" pitchFamily="34" charset="-120"/>
-              </a:rPr>
-              <a:t> — mountain pose. We stand still and tall, like a mountain."</a:t>
-            </a:r>
-            <a:endParaRPr lang="en-US" sz="1200" dirty="0"/>
-          </a:p>
-        </p:txBody>
-      </p:sp>
-      <p:sp>
-        <p:nvSpPr>
-          <p:cNvPr id="6" name="Text 4"/>
           <p:cNvSpPr/>
           <p:nvPr/>
         </p:nvSpPr>
@@ -3641,7 +4106,7 @@
                 <a:ea typeface="Georgia" pitchFamily="34" charset="-122"/>
                 <a:cs typeface="Georgia" pitchFamily="34" charset="-120"/>
               </a:rPr>
-              <a:t>Tāḍāsana practice (12 min)</a:t>
+              <a:t>Story (5 min)</a:t>
             </a:r>
             <a:endParaRPr lang="en-US" sz="1800" dirty="0"/>
           </a:p>
@@ -3656,7 +4121,7 @@
         <p:spPr>
           <a:xfrm>
             <a:off x="406301" y="870942"/>
-            <a:ext cx="8498026" cy="213271"/>
+            <a:ext cx="8498026" cy="426541"/>
           </a:xfrm>
           <a:prstGeom prst="rect">
             <a:avLst/>
@@ -3681,7 +4146,7 @@
               <a:buNone/>
             </a:pPr>
             <a:r>
-              <a:rPr lang="en-US" sz="1200" dirty="0">
+              <a:rPr lang="en-US" sz="1200" i="1" dirty="0">
                 <a:solidFill>
                   <a:srgbClr val="2C2C2C"/>
                 </a:solidFill>
@@ -3689,7 +4154,7 @@
                 <a:ea typeface="Verdana" pitchFamily="34" charset="-122"/>
                 <a:cs typeface="Verdana" pitchFamily="34" charset="-120"/>
               </a:rPr>
-              <a:t>– Show the picture of a mountain. </a:t>
+              <a:t>"Yoga is a very old practice from India. It uses our bodies, our breath, and our mind — all together. The Sanskrit word </a:t>
             </a:r>
             <a:pPr algn="l" indent="0" marL="0">
               <a:lnSpc>
@@ -3704,7 +4169,7 @@
               <a:buNone/>
             </a:pPr>
             <a:r>
-              <a:rPr lang="en-US" sz="1200" i="1" dirty="0">
+              <a:rPr lang="en-US" sz="1200" b="1" i="1" dirty="0">
                 <a:solidFill>
                   <a:srgbClr val="2C2C2C"/>
                 </a:solidFill>
@@ -3712,7 +4177,7 @@
                 <a:ea typeface="Verdana" pitchFamily="34" charset="-122"/>
                 <a:cs typeface="Verdana" pitchFamily="34" charset="-120"/>
               </a:rPr>
-              <a:t>"What's a mountain like?"</a:t>
+              <a:t>yoga</a:t>
             </a:r>
             <a:pPr algn="l" indent="0" marL="0">
               <a:lnSpc>
@@ -3727,7 +4192,7 @@
               <a:buNone/>
             </a:pPr>
             <a:r>
-              <a:rPr lang="en-US" sz="1200" dirty="0">
+              <a:rPr lang="en-US" sz="1200" i="1" dirty="0">
                 <a:solidFill>
                   <a:srgbClr val="2C2C2C"/>
                 </a:solidFill>
@@ -3735,7 +4200,7 @@
                 <a:ea typeface="Verdana" pitchFamily="34" charset="-122"/>
                 <a:cs typeface="Verdana" pitchFamily="34" charset="-120"/>
               </a:rPr>
-              <a:t> (Tall. Strong. Still.)</a:t>
+              <a:t> means 'to join.' We join body, breath, and mind."</a:t>
             </a:r>
             <a:endParaRPr lang="en-US" sz="1200" dirty="0"/>
           </a:p>
@@ -3749,8 +4214,8 @@
         </p:nvSpPr>
         <p:spPr>
           <a:xfrm>
-            <a:off x="634901" y="1173063"/>
-            <a:ext cx="8102798" cy="281880"/>
+            <a:off x="406301" y="1373684"/>
+            <a:ext cx="8498026" cy="213271"/>
           </a:xfrm>
           <a:prstGeom prst="rect">
             <a:avLst/>
@@ -3762,15 +4227,17 @@
           <a:bodyPr wrap="square" lIns="0" tIns="0" rIns="0" bIns="0" rtlCol="0" anchor="t"/>
           <a:lstStyle/>
           <a:p>
-            <a:pPr algn="l" marL="342900" indent="-342900">
-              <a:lnSpc>
-                <a:spcPts val="1620"/>
-              </a:lnSpc>
-              <a:spcAft>
-                <a:spcPts val="300"/>
-              </a:spcAft>
-              <a:buSzPct val="100000"/>
-              <a:buChar char="•"/>
+            <a:pPr algn="l" indent="0" marL="0">
+              <a:lnSpc>
+                <a:spcPts val="1680"/>
+              </a:lnSpc>
+              <a:spcBef>
+                <a:spcPts val="300"/>
+              </a:spcBef>
+              <a:spcAft>
+                <a:spcPts val="300"/>
+              </a:spcAft>
+              <a:buNone/>
             </a:pPr>
             <a:r>
               <a:rPr lang="en-US" sz="1200" i="1" dirty="0">
@@ -3781,33 +4248,8 @@
                 <a:ea typeface="Verdana" pitchFamily="34" charset="-122"/>
                 <a:cs typeface="Verdana" pitchFamily="34" charset="-120"/>
               </a:rPr>
-              <a:t>"Now BE a mountain."</a:t>
-            </a:r>
-            <a:endParaRPr lang="en-US" sz="1200" dirty="0"/>
-          </a:p>
-        </p:txBody>
-      </p:sp>
-      <p:sp>
-        <p:nvSpPr>
-          <p:cNvPr id="6" name="Text 4"/>
-          <p:cNvSpPr/>
-          <p:nvPr/>
-        </p:nvSpPr>
-        <p:spPr>
-          <a:xfrm>
-            <a:off x="406301" y="1543794"/>
-            <a:ext cx="8498026" cy="213271"/>
-          </a:xfrm>
-          <a:prstGeom prst="rect">
-            <a:avLst/>
-          </a:prstGeom>
-          <a:noFill/>
-          <a:ln/>
-        </p:spPr>
-        <p:txBody>
-          <a:bodyPr wrap="square" lIns="0" tIns="0" rIns="0" bIns="0" rtlCol="0" anchor="t"/>
-          <a:lstStyle/>
-          <a:p>
+              <a:t>"Today our pose is </a:t>
+            </a:r>
             <a:pPr algn="l" indent="0" marL="0">
               <a:lnSpc>
                 <a:spcPts val="1680"/>
@@ -3821,7 +4263,7 @@
               <a:buNone/>
             </a:pPr>
             <a:r>
-              <a:rPr lang="en-US" sz="1200" dirty="0">
+              <a:rPr lang="en-US" sz="1200" b="1" i="1" dirty="0">
                 <a:solidFill>
                   <a:srgbClr val="2C2C2C"/>
                 </a:solidFill>
@@ -3829,42 +4271,19 @@
                 <a:ea typeface="Verdana" pitchFamily="34" charset="-122"/>
                 <a:cs typeface="Verdana" pitchFamily="34" charset="-120"/>
               </a:rPr>
-              <a:t>– Stand at top of mat. Feet hip-width.</a:t>
-            </a:r>
-            <a:endParaRPr lang="en-US" sz="1200" dirty="0"/>
-          </a:p>
-        </p:txBody>
-      </p:sp>
-      <p:sp>
-        <p:nvSpPr>
-          <p:cNvPr id="7" name="Text 5"/>
-          <p:cNvSpPr/>
-          <p:nvPr/>
-        </p:nvSpPr>
-        <p:spPr>
-          <a:xfrm>
-            <a:off x="634901" y="1845915"/>
-            <a:ext cx="8102798" cy="769441"/>
-          </a:xfrm>
-          <a:prstGeom prst="rect">
-            <a:avLst/>
-          </a:prstGeom>
-          <a:noFill/>
-          <a:ln/>
-        </p:spPr>
-        <p:txBody>
-          <a:bodyPr wrap="square" lIns="0" tIns="0" rIns="0" bIns="0" rtlCol="0" anchor="t"/>
-          <a:lstStyle/>
-          <a:p>
-            <a:pPr algn="l" marL="342900" indent="-342900">
-              <a:lnSpc>
-                <a:spcPts val="1620"/>
-              </a:lnSpc>
-              <a:spcAft>
-                <a:spcPts val="300"/>
-              </a:spcAft>
-              <a:buSzPct val="100000"/>
-              <a:buChar char="•"/>
+              <a:t>tāḍāsana</a:t>
+            </a:r>
+            <a:pPr algn="l" indent="0" marL="0">
+              <a:lnSpc>
+                <a:spcPts val="1680"/>
+              </a:lnSpc>
+              <a:spcBef>
+                <a:spcPts val="300"/>
+              </a:spcBef>
+              <a:spcAft>
+                <a:spcPts val="300"/>
+              </a:spcAft>
+              <a:buNone/>
             </a:pPr>
             <a:r>
               <a:rPr lang="en-US" sz="1200" i="1" dirty="0">
@@ -3875,229 +4294,15 @@
                 <a:ea typeface="Verdana" pitchFamily="34" charset="-122"/>
                 <a:cs typeface="Verdana" pitchFamily="34" charset="-120"/>
               </a:rPr>
-              <a:t>"Press your feet into the ground like roots."</a:t>
+              <a:t> — mountain pose. We stand still and tall, like a mountain."</a:t>
             </a:r>
             <a:endParaRPr lang="en-US" sz="1200" dirty="0"/>
           </a:p>
-          <a:p>
-            <a:pPr algn="l" marL="342900" indent="-342900">
-              <a:lnSpc>
-                <a:spcPts val="1620"/>
-              </a:lnSpc>
-              <a:spcAft>
-                <a:spcPts val="300"/>
-              </a:spcAft>
-              <a:buSzPct val="100000"/>
-              <a:buChar char="•"/>
-            </a:pPr>
-            <a:r>
-              <a:rPr lang="en-US" sz="1200" i="1" dirty="0">
-                <a:solidFill>
-                  <a:srgbClr val="2C2C2C"/>
-                </a:solidFill>
-                <a:latin typeface="Verdana" pitchFamily="34" charset="0"/>
-                <a:ea typeface="Verdana" pitchFamily="34" charset="-122"/>
-                <a:cs typeface="Verdana" pitchFamily="34" charset="-120"/>
-              </a:rPr>
-              <a:t>"Stand TALL. Pretend a string is gently pulling the top of your head up."</a:t>
-            </a:r>
-            <a:endParaRPr lang="en-US" sz="1200" dirty="0"/>
-          </a:p>
-          <a:p>
-            <a:pPr algn="l" marL="342900" indent="-342900">
-              <a:lnSpc>
-                <a:spcPts val="1620"/>
-              </a:lnSpc>
-              <a:spcAft>
-                <a:spcPts val="300"/>
-              </a:spcAft>
-              <a:buSzPct val="100000"/>
-              <a:buChar char="•"/>
-            </a:pPr>
-            <a:r>
-              <a:rPr lang="en-US" sz="1200" i="1" dirty="0">
-                <a:solidFill>
-                  <a:srgbClr val="2C2C2C"/>
-                </a:solidFill>
-                <a:latin typeface="Verdana" pitchFamily="34" charset="0"/>
-                <a:ea typeface="Verdana" pitchFamily="34" charset="-122"/>
-                <a:cs typeface="Verdana" pitchFamily="34" charset="-120"/>
-              </a:rPr>
-              <a:t>"Take 3 deep breaths. Breathe like a calm mountain."</a:t>
-            </a:r>
-            <a:endParaRPr lang="en-US" sz="1200" dirty="0"/>
-          </a:p>
-        </p:txBody>
-      </p:sp>
-      <p:sp>
-        <p:nvSpPr>
-          <p:cNvPr id="8" name="Text 6"/>
-          <p:cNvSpPr/>
-          <p:nvPr/>
-        </p:nvSpPr>
-        <p:spPr>
-          <a:xfrm>
-            <a:off x="406301" y="2704207"/>
-            <a:ext cx="8498026" cy="213271"/>
-          </a:xfrm>
-          <a:prstGeom prst="rect">
-            <a:avLst/>
-          </a:prstGeom>
-          <a:noFill/>
-          <a:ln/>
-        </p:spPr>
-        <p:txBody>
-          <a:bodyPr wrap="square" lIns="0" tIns="0" rIns="0" bIns="0" rtlCol="0" anchor="t"/>
-          <a:lstStyle/>
-          <a:p>
-            <a:pPr algn="l" indent="0" marL="0">
-              <a:lnSpc>
-                <a:spcPts val="1680"/>
-              </a:lnSpc>
-              <a:spcBef>
-                <a:spcPts val="300"/>
-              </a:spcBef>
-              <a:spcAft>
-                <a:spcPts val="300"/>
-              </a:spcAft>
-              <a:buNone/>
-            </a:pPr>
-            <a:r>
-              <a:rPr lang="en-US" sz="1200" dirty="0">
-                <a:solidFill>
-                  <a:srgbClr val="2C2C2C"/>
-                </a:solidFill>
-                <a:latin typeface="Verdana" pitchFamily="34" charset="0"/>
-                <a:ea typeface="Verdana" pitchFamily="34" charset="-122"/>
-                <a:cs typeface="Verdana" pitchFamily="34" charset="-120"/>
-              </a:rPr>
-              <a:t>Hold for 30 sec. Release. Repeat 3 times.</a:t>
-            </a:r>
-            <a:endParaRPr lang="en-US" sz="1200" dirty="0"/>
-          </a:p>
-        </p:txBody>
-      </p:sp>
-      <p:sp>
-        <p:nvSpPr>
-          <p:cNvPr id="9" name="Text 7"/>
-          <p:cNvSpPr/>
-          <p:nvPr/>
-        </p:nvSpPr>
-        <p:spPr>
-          <a:xfrm>
-            <a:off x="406301" y="2993678"/>
-            <a:ext cx="8498026" cy="213271"/>
-          </a:xfrm>
-          <a:prstGeom prst="rect">
-            <a:avLst/>
-          </a:prstGeom>
-          <a:noFill/>
-          <a:ln/>
-        </p:spPr>
-        <p:txBody>
-          <a:bodyPr wrap="square" lIns="0" tIns="0" rIns="0" bIns="0" rtlCol="0" anchor="t"/>
-          <a:lstStyle/>
-          <a:p>
-            <a:pPr algn="l" indent="0" marL="0">
-              <a:lnSpc>
-                <a:spcPts val="1680"/>
-              </a:lnSpc>
-              <a:spcBef>
-                <a:spcPts val="300"/>
-              </a:spcBef>
-              <a:spcAft>
-                <a:spcPts val="300"/>
-              </a:spcAft>
-              <a:buNone/>
-            </a:pPr>
-            <a:r>
-              <a:rPr lang="en-US" sz="1200" dirty="0">
-                <a:solidFill>
-                  <a:srgbClr val="2C2C2C"/>
-                </a:solidFill>
-                <a:latin typeface="Verdana" pitchFamily="34" charset="0"/>
-                <a:ea typeface="Verdana" pitchFamily="34" charset="-122"/>
-                <a:cs typeface="Verdana" pitchFamily="34" charset="-120"/>
-              </a:rPr>
-              <a:t>Between rounds, ask:</a:t>
-            </a:r>
-            <a:endParaRPr lang="en-US" sz="1200" dirty="0"/>
-          </a:p>
-        </p:txBody>
-      </p:sp>
-      <p:sp>
-        <p:nvSpPr>
-          <p:cNvPr id="10" name="Text 8"/>
-          <p:cNvSpPr/>
-          <p:nvPr/>
-        </p:nvSpPr>
-        <p:spPr>
-          <a:xfrm>
-            <a:off x="634901" y="3295799"/>
-            <a:ext cx="8102798" cy="525661"/>
-          </a:xfrm>
-          <a:prstGeom prst="rect">
-            <a:avLst/>
-          </a:prstGeom>
-          <a:noFill/>
-          <a:ln/>
-        </p:spPr>
-        <p:txBody>
-          <a:bodyPr wrap="square" lIns="0" tIns="0" rIns="0" bIns="0" rtlCol="0" anchor="t"/>
-          <a:lstStyle/>
-          <a:p>
-            <a:pPr algn="l" marL="342900" indent="-342900">
-              <a:lnSpc>
-                <a:spcPts val="1620"/>
-              </a:lnSpc>
-              <a:spcAft>
-                <a:spcPts val="300"/>
-              </a:spcAft>
-              <a:buSzPct val="100000"/>
-              <a:buChar char="•"/>
-            </a:pPr>
-            <a:r>
-              <a:rPr lang="en-US" sz="1200" i="1" dirty="0">
-                <a:solidFill>
-                  <a:srgbClr val="2C2C2C"/>
-                </a:solidFill>
-                <a:latin typeface="Verdana" pitchFamily="34" charset="0"/>
-                <a:ea typeface="Verdana" pitchFamily="34" charset="-122"/>
-                <a:cs typeface="Verdana" pitchFamily="34" charset="-120"/>
-              </a:rPr>
-              <a:t>"Did anyone feel taller?"</a:t>
-            </a:r>
-            <a:endParaRPr lang="en-US" sz="1200" dirty="0"/>
-          </a:p>
-          <a:p>
-            <a:pPr algn="l" marL="342900" indent="-342900">
-              <a:lnSpc>
-                <a:spcPts val="1620"/>
-              </a:lnSpc>
-              <a:spcAft>
-                <a:spcPts val="300"/>
-              </a:spcAft>
-              <a:buSzPct val="100000"/>
-              <a:buChar char="•"/>
-            </a:pPr>
-            <a:r>
-              <a:rPr lang="en-US" sz="1200" i="1" dirty="0">
-                <a:solidFill>
-                  <a:srgbClr val="2C2C2C"/>
-                </a:solidFill>
-                <a:latin typeface="Verdana" pitchFamily="34" charset="0"/>
-                <a:ea typeface="Verdana" pitchFamily="34" charset="-122"/>
-                <a:cs typeface="Verdana" pitchFamily="34" charset="-120"/>
-              </a:rPr>
-              <a:t>"Did your feet feel heavier or lighter?"</a:t>
-            </a:r>
-            <a:endParaRPr lang="en-US" sz="1200" dirty="0"/>
-          </a:p>
-        </p:txBody>
-      </p:sp>
-      <p:sp>
-        <p:nvSpPr>
-          <p:cNvPr id="11" name="Text 9"/>
+        </p:txBody>
+      </p:sp>
+      <p:sp>
+        <p:nvSpPr>
+          <p:cNvPr id="6" name="Text 4"/>
           <p:cNvSpPr/>
           <p:nvPr/>
         </p:nvSpPr>
@@ -4247,7 +4452,7 @@
                 <a:ea typeface="Georgia" pitchFamily="34" charset="-122"/>
                 <a:cs typeface="Georgia" pitchFamily="34" charset="-120"/>
               </a:rPr>
-              <a:t>Reflection (5 min)</a:t>
+              <a:t>Tāḍāsana practice (12 min)</a:t>
             </a:r>
             <a:endParaRPr lang="en-US" sz="1800" dirty="0"/>
           </a:p>
@@ -4262,7 +4467,7 @@
         <p:spPr>
           <a:xfrm>
             <a:off x="634901" y="883593"/>
-            <a:ext cx="8102798" cy="525661"/>
+            <a:ext cx="8102798" cy="1500783"/>
           </a:xfrm>
           <a:prstGeom prst="rect">
             <a:avLst/>
@@ -4285,7 +4490,7 @@
               <a:buChar char="•"/>
             </a:pPr>
             <a:r>
-              <a:rPr lang="en-US" sz="1200" i="1" dirty="0">
+              <a:rPr lang="en-US" sz="1200" dirty="0">
                 <a:solidFill>
                   <a:srgbClr val="2C2C2C"/>
                 </a:solidFill>
@@ -4293,7 +4498,7 @@
                 <a:ea typeface="Verdana" pitchFamily="34" charset="-122"/>
                 <a:cs typeface="Verdana" pitchFamily="34" charset="-120"/>
               </a:rPr>
-              <a:t>"Why might mountains be the first pose we learn?"</a:t>
+              <a:t>Show the picture of a mountain. </a:t>
             </a:r>
             <a:pPr algn="l" indent="0" marL="0">
               <a:lnSpc>
@@ -4305,7 +4510,7 @@
               <a:buNone/>
             </a:pPr>
             <a:r>
-              <a:rPr lang="en-US" sz="1200" dirty="0">
+              <a:rPr lang="en-US" sz="1200" i="1" dirty="0">
                 <a:solidFill>
                   <a:srgbClr val="2C2C2C"/>
                 </a:solidFill>
@@ -4313,23 +4518,19 @@
                 <a:ea typeface="Verdana" pitchFamily="34" charset="-122"/>
                 <a:cs typeface="Verdana" pitchFamily="34" charset="-120"/>
               </a:rPr>
-              <a:t> (Steady. Strong. Doesn't move.)</a:t>
-            </a:r>
-            <a:endParaRPr lang="en-US" sz="1200" dirty="0"/>
-          </a:p>
-          <a:p>
-            <a:pPr algn="l" marL="342900" indent="-342900">
+              <a:t>"What's a mountain like?"</a:t>
+            </a:r>
+            <a:pPr algn="l" indent="0" marL="0">
               <a:lnSpc>
                 <a:spcPts val="1620"/>
               </a:lnSpc>
               <a:spcAft>
                 <a:spcPts val="300"/>
               </a:spcAft>
-              <a:buSzPct val="100000"/>
-              <a:buChar char="•"/>
-            </a:pPr>
-            <a:r>
-              <a:rPr lang="en-US" sz="1200" i="1" dirty="0">
+              <a:buNone/>
+            </a:pPr>
+            <a:r>
+              <a:rPr lang="en-US" sz="1200" dirty="0">
                 <a:solidFill>
                   <a:srgbClr val="2C2C2C"/>
                 </a:solidFill>
@@ -4337,7 +4538,127 @@
                 <a:ea typeface="Verdana" pitchFamily="34" charset="-122"/>
                 <a:cs typeface="Verdana" pitchFamily="34" charset="-120"/>
               </a:rPr>
-              <a:t>"You're a mountain. You can come back to mountain anytime you need to feel steady."</a:t>
+              <a:t> (Tall. Strong. Still.)</a:t>
+            </a:r>
+            <a:endParaRPr lang="en-US" sz="1200" dirty="0"/>
+          </a:p>
+          <a:p>
+            <a:pPr algn="l" marL="342900" indent="-342900">
+              <a:lnSpc>
+                <a:spcPts val="1620"/>
+              </a:lnSpc>
+              <a:spcAft>
+                <a:spcPts val="300"/>
+              </a:spcAft>
+              <a:buSzPct val="100000"/>
+              <a:buChar char="•"/>
+            </a:pPr>
+            <a:r>
+              <a:rPr lang="en-US" sz="1200" i="1" dirty="0">
+                <a:solidFill>
+                  <a:srgbClr val="2C2C2C"/>
+                </a:solidFill>
+                <a:latin typeface="Verdana" pitchFamily="34" charset="0"/>
+                <a:ea typeface="Verdana" pitchFamily="34" charset="-122"/>
+                <a:cs typeface="Verdana" pitchFamily="34" charset="-120"/>
+              </a:rPr>
+              <a:t>"Now BE a mountain."</a:t>
+            </a:r>
+            <a:endParaRPr lang="en-US" sz="1200" dirty="0"/>
+          </a:p>
+          <a:p>
+            <a:pPr algn="l" marL="342900" indent="-342900">
+              <a:lnSpc>
+                <a:spcPts val="1620"/>
+              </a:lnSpc>
+              <a:spcAft>
+                <a:spcPts val="300"/>
+              </a:spcAft>
+              <a:buSzPct val="100000"/>
+              <a:buChar char="•"/>
+            </a:pPr>
+            <a:r>
+              <a:rPr lang="en-US" sz="1200" dirty="0">
+                <a:solidFill>
+                  <a:srgbClr val="2C2C2C"/>
+                </a:solidFill>
+                <a:latin typeface="Verdana" pitchFamily="34" charset="0"/>
+                <a:ea typeface="Verdana" pitchFamily="34" charset="-122"/>
+                <a:cs typeface="Verdana" pitchFamily="34" charset="-120"/>
+              </a:rPr>
+              <a:t>Stand at top of mat. Feet hip-width.</a:t>
+            </a:r>
+            <a:endParaRPr lang="en-US" sz="1200" dirty="0"/>
+          </a:p>
+          <a:p>
+            <a:pPr algn="l" marL="342900" indent="-342900">
+              <a:lnSpc>
+                <a:spcPts val="1620"/>
+              </a:lnSpc>
+              <a:spcAft>
+                <a:spcPts val="300"/>
+              </a:spcAft>
+              <a:buSzPct val="100000"/>
+              <a:buChar char="•"/>
+            </a:pPr>
+            <a:r>
+              <a:rPr lang="en-US" sz="1200" i="1" dirty="0">
+                <a:solidFill>
+                  <a:srgbClr val="2C2C2C"/>
+                </a:solidFill>
+                <a:latin typeface="Verdana" pitchFamily="34" charset="0"/>
+                <a:ea typeface="Verdana" pitchFamily="34" charset="-122"/>
+                <a:cs typeface="Verdana" pitchFamily="34" charset="-120"/>
+              </a:rPr>
+              <a:t>"Press your feet into the ground like roots."</a:t>
+            </a:r>
+            <a:endParaRPr lang="en-US" sz="1200" dirty="0"/>
+          </a:p>
+          <a:p>
+            <a:pPr algn="l" marL="342900" indent="-342900">
+              <a:lnSpc>
+                <a:spcPts val="1620"/>
+              </a:lnSpc>
+              <a:spcAft>
+                <a:spcPts val="300"/>
+              </a:spcAft>
+              <a:buSzPct val="100000"/>
+              <a:buChar char="•"/>
+            </a:pPr>
+            <a:r>
+              <a:rPr lang="en-US" sz="1200" i="1" dirty="0">
+                <a:solidFill>
+                  <a:srgbClr val="2C2C2C"/>
+                </a:solidFill>
+                <a:latin typeface="Verdana" pitchFamily="34" charset="0"/>
+                <a:ea typeface="Verdana" pitchFamily="34" charset="-122"/>
+                <a:cs typeface="Verdana" pitchFamily="34" charset="-120"/>
+              </a:rPr>
+              <a:t>"Stand TALL. Pretend a string is gently pulling the top of your head up."</a:t>
+            </a:r>
+            <a:endParaRPr lang="en-US" sz="1200" dirty="0"/>
+          </a:p>
+          <a:p>
+            <a:pPr algn="l" marL="342900" indent="-342900">
+              <a:lnSpc>
+                <a:spcPts val="1620"/>
+              </a:lnSpc>
+              <a:spcAft>
+                <a:spcPts val="300"/>
+              </a:spcAft>
+              <a:buSzPct val="100000"/>
+              <a:buChar char="•"/>
+            </a:pPr>
+            <a:r>
+              <a:rPr lang="en-US" sz="1200" i="1" dirty="0">
+                <a:solidFill>
+                  <a:srgbClr val="2C2C2C"/>
+                </a:solidFill>
+                <a:latin typeface="Verdana" pitchFamily="34" charset="0"/>
+                <a:ea typeface="Verdana" pitchFamily="34" charset="-122"/>
+                <a:cs typeface="Verdana" pitchFamily="34" charset="-120"/>
+              </a:rPr>
+              <a:t>"Take 3 deep breaths. Breathe like a calm mountain."</a:t>
             </a:r>
             <a:endParaRPr lang="en-US" sz="1200" dirty="0"/>
           </a:p>
@@ -4495,7 +4816,7 @@
                 <a:ea typeface="Georgia" pitchFamily="34" charset="-122"/>
                 <a:cs typeface="Georgia" pitchFamily="34" charset="-120"/>
               </a:rPr>
-              <a:t>Close (5 min)</a:t>
+              <a:t>Tāḍāsana practice (12 min) (cont.)</a:t>
             </a:r>
             <a:endParaRPr lang="en-US" sz="1800" dirty="0"/>
           </a:p>
@@ -4543,8 +4864,33 @@
                 <a:ea typeface="Verdana" pitchFamily="34" charset="-122"/>
                 <a:cs typeface="Verdana" pitchFamily="34" charset="-120"/>
               </a:rPr>
-              <a:t>Tāḍāsana one more time. Then sit. Hands together at heart. </a:t>
-            </a:r>
+              <a:t>Hold for 30 sec. Release. Repeat 3 times.</a:t>
+            </a:r>
+            <a:endParaRPr lang="en-US" sz="1200" dirty="0"/>
+          </a:p>
+        </p:txBody>
+      </p:sp>
+      <p:sp>
+        <p:nvSpPr>
+          <p:cNvPr id="5" name="Text 3"/>
+          <p:cNvSpPr/>
+          <p:nvPr/>
+        </p:nvSpPr>
+        <p:spPr>
+          <a:xfrm>
+            <a:off x="406301" y="1160413"/>
+            <a:ext cx="8498026" cy="213271"/>
+          </a:xfrm>
+          <a:prstGeom prst="rect">
+            <a:avLst/>
+          </a:prstGeom>
+          <a:noFill/>
+          <a:ln/>
+        </p:spPr>
+        <p:txBody>
+          <a:bodyPr wrap="square" lIns="0" tIns="0" rIns="0" bIns="0" rtlCol="0" anchor="t"/>
+          <a:lstStyle/>
+          <a:p>
             <a:pPr algn="l" indent="0" marL="0">
               <a:lnSpc>
                 <a:spcPts val="1680"/>
@@ -4558,7 +4904,7 @@
               <a:buNone/>
             </a:pPr>
             <a:r>
-              <a:rPr lang="en-US" sz="1200" i="1" dirty="0">
+              <a:rPr lang="en-US" sz="1200" dirty="0">
                 <a:solidFill>
                   <a:srgbClr val="2C2C2C"/>
                 </a:solidFill>
@@ -4566,22 +4912,45 @@
                 <a:ea typeface="Verdana" pitchFamily="34" charset="-122"/>
                 <a:cs typeface="Verdana" pitchFamily="34" charset="-120"/>
               </a:rPr>
-              <a:t>"Namaste"</a:t>
-            </a:r>
-            <a:pPr algn="l" indent="0" marL="0">
-              <a:lnSpc>
-                <a:spcPts val="1680"/>
-              </a:lnSpc>
-              <a:spcBef>
-                <a:spcPts val="300"/>
-              </a:spcBef>
-              <a:spcAft>
-                <a:spcPts val="300"/>
-              </a:spcAft>
-              <a:buNone/>
-            </a:pPr>
-            <a:r>
-              <a:rPr lang="en-US" sz="1200" dirty="0">
+              <a:t>Between rounds, ask:</a:t>
+            </a:r>
+            <a:endParaRPr lang="en-US" sz="1200" dirty="0"/>
+          </a:p>
+        </p:txBody>
+      </p:sp>
+      <p:sp>
+        <p:nvSpPr>
+          <p:cNvPr id="6" name="Text 4"/>
+          <p:cNvSpPr/>
+          <p:nvPr/>
+        </p:nvSpPr>
+        <p:spPr>
+          <a:xfrm>
+            <a:off x="634901" y="1462534"/>
+            <a:ext cx="8102798" cy="525661"/>
+          </a:xfrm>
+          <a:prstGeom prst="rect">
+            <a:avLst/>
+          </a:prstGeom>
+          <a:noFill/>
+          <a:ln/>
+        </p:spPr>
+        <p:txBody>
+          <a:bodyPr wrap="square" lIns="0" tIns="0" rIns="0" bIns="0" rtlCol="0" anchor="t"/>
+          <a:lstStyle/>
+          <a:p>
+            <a:pPr algn="l" marL="342900" indent="-342900">
+              <a:lnSpc>
+                <a:spcPts val="1620"/>
+              </a:lnSpc>
+              <a:spcAft>
+                <a:spcPts val="300"/>
+              </a:spcAft>
+              <a:buSzPct val="100000"/>
+              <a:buChar char="•"/>
+            </a:pPr>
+            <a:r>
+              <a:rPr lang="en-US" sz="1200" i="1" dirty="0">
                 <a:solidFill>
                   <a:srgbClr val="2C2C2C"/>
                 </a:solidFill>
@@ -4589,19 +4958,20 @@
                 <a:ea typeface="Verdana" pitchFamily="34" charset="-122"/>
                 <a:cs typeface="Verdana" pitchFamily="34" charset="-120"/>
               </a:rPr>
-              <a:t> — </a:t>
-            </a:r>
-            <a:pPr algn="l" indent="0" marL="0">
-              <a:lnSpc>
-                <a:spcPts val="1680"/>
-              </a:lnSpc>
-              <a:spcBef>
-                <a:spcPts val="300"/>
-              </a:spcBef>
-              <a:spcAft>
-                <a:spcPts val="300"/>
-              </a:spcAft>
-              <a:buNone/>
+              <a:t>"Did anyone feel taller?"</a:t>
+            </a:r>
+            <a:endParaRPr lang="en-US" sz="1200" dirty="0"/>
+          </a:p>
+          <a:p>
+            <a:pPr algn="l" marL="342900" indent="-342900">
+              <a:lnSpc>
+                <a:spcPts val="1620"/>
+              </a:lnSpc>
+              <a:spcAft>
+                <a:spcPts val="300"/>
+              </a:spcAft>
+              <a:buSzPct val="100000"/>
+              <a:buChar char="•"/>
             </a:pPr>
             <a:r>
               <a:rPr lang="en-US" sz="1200" i="1" dirty="0">
@@ -4612,7 +4982,7 @@
                 <a:ea typeface="Verdana" pitchFamily="34" charset="-122"/>
                 <a:cs typeface="Verdana" pitchFamily="34" charset="-120"/>
               </a:rPr>
-              <a:t>"I bow to you."</a:t>
+              <a:t>"Did your feet feel heavier or lighter?"</a:t>
             </a:r>
             <a:endParaRPr lang="en-US" sz="1200" dirty="0"/>
           </a:p>
@@ -4620,7 +4990,7 @@
       </p:sp>
       <p:sp>
         <p:nvSpPr>
-          <p:cNvPr id="5" name="Text 3"/>
+          <p:cNvPr id="7" name="Text 5"/>
           <p:cNvSpPr/>
           <p:nvPr/>
         </p:nvSpPr>
@@ -4770,7 +5140,7 @@
                 <a:ea typeface="Georgia" pitchFamily="34" charset="-122"/>
                 <a:cs typeface="Georgia" pitchFamily="34" charset="-120"/>
               </a:rPr>
-              <a:t>Homework</a:t>
+              <a:t>Reflection (5 min)</a:t>
             </a:r>
             <a:endParaRPr lang="en-US" sz="1800" dirty="0"/>
           </a:p>
@@ -4784,8 +5154,8 @@
         </p:nvSpPr>
         <p:spPr>
           <a:xfrm>
-            <a:off x="406301" y="870942"/>
-            <a:ext cx="8498026" cy="213271"/>
+            <a:off x="634901" y="883593"/>
+            <a:ext cx="8102798" cy="525661"/>
           </a:xfrm>
           <a:prstGeom prst="rect">
             <a:avLst/>
@@ -4797,20 +5167,18 @@
           <a:bodyPr wrap="square" lIns="0" tIns="0" rIns="0" bIns="0" rtlCol="0" anchor="t"/>
           <a:lstStyle/>
           <a:p>
-            <a:pPr algn="l" indent="0" marL="0">
-              <a:lnSpc>
-                <a:spcPts val="1680"/>
-              </a:lnSpc>
-              <a:spcBef>
-                <a:spcPts val="300"/>
-              </a:spcBef>
-              <a:spcAft>
-                <a:spcPts val="300"/>
-              </a:spcAft>
-              <a:buNone/>
-            </a:pPr>
-            <a:r>
-              <a:rPr lang="en-US" sz="1200" dirty="0">
+            <a:pPr algn="l" marL="342900" indent="-342900">
+              <a:lnSpc>
+                <a:spcPts val="1620"/>
+              </a:lnSpc>
+              <a:spcAft>
+                <a:spcPts val="300"/>
+              </a:spcAft>
+              <a:buSzPct val="100000"/>
+              <a:buChar char="•"/>
+            </a:pPr>
+            <a:r>
+              <a:rPr lang="en-US" sz="1200" i="1" dirty="0">
                 <a:solidFill>
                   <a:srgbClr val="2C2C2C"/>
                 </a:solidFill>
@@ -4818,7 +5186,51 @@
                 <a:ea typeface="Verdana" pitchFamily="34" charset="-122"/>
                 <a:cs typeface="Verdana" pitchFamily="34" charset="-120"/>
               </a:rPr>
-              <a:t>– Stand like a mountain for 30 seconds before brushing your teeth tomorrow.</a:t>
+              <a:t>"Why might mountains be the first pose we learn?"</a:t>
+            </a:r>
+            <a:pPr algn="l" indent="0" marL="0">
+              <a:lnSpc>
+                <a:spcPts val="1620"/>
+              </a:lnSpc>
+              <a:spcAft>
+                <a:spcPts val="300"/>
+              </a:spcAft>
+              <a:buNone/>
+            </a:pPr>
+            <a:r>
+              <a:rPr lang="en-US" sz="1200" dirty="0">
+                <a:solidFill>
+                  <a:srgbClr val="2C2C2C"/>
+                </a:solidFill>
+                <a:latin typeface="Verdana" pitchFamily="34" charset="0"/>
+                <a:ea typeface="Verdana" pitchFamily="34" charset="-122"/>
+                <a:cs typeface="Verdana" pitchFamily="34" charset="-120"/>
+              </a:rPr>
+              <a:t> (Steady. Strong. Doesn't move.)</a:t>
+            </a:r>
+            <a:endParaRPr lang="en-US" sz="1200" dirty="0"/>
+          </a:p>
+          <a:p>
+            <a:pPr algn="l" marL="342900" indent="-342900">
+              <a:lnSpc>
+                <a:spcPts val="1620"/>
+              </a:lnSpc>
+              <a:spcAft>
+                <a:spcPts val="300"/>
+              </a:spcAft>
+              <a:buSzPct val="100000"/>
+              <a:buChar char="•"/>
+            </a:pPr>
+            <a:r>
+              <a:rPr lang="en-US" sz="1200" i="1" dirty="0">
+                <a:solidFill>
+                  <a:srgbClr val="2C2C2C"/>
+                </a:solidFill>
+                <a:latin typeface="Verdana" pitchFamily="34" charset="0"/>
+                <a:ea typeface="Verdana" pitchFamily="34" charset="-122"/>
+                <a:cs typeface="Verdana" pitchFamily="34" charset="-120"/>
+              </a:rPr>
+              <a:t>"You're a mountain. You can come back to mountain anytime you need to feel steady."</a:t>
             </a:r>
             <a:endParaRPr lang="en-US" sz="1200" dirty="0"/>
           </a:p>
